--- a/gyeongsan/GSJOB2_0_오리엔테이션.pptx
+++ b/gyeongsan/GSJOB2_0_오리엔테이션.pptx
@@ -3110,7 +3110,7 @@
             <a:avLst/>
           </a:prstGeom>
           <a:solidFill>
-            <a:srgbClr val="F1F7F5"/>
+            <a:srgbClr val="F2F5F9"/>
           </a:solidFill>
           <a:ln>
             <a:noFill/>
@@ -3230,7 +3230,7 @@
             <a:avLst/>
           </a:prstGeom>
           <a:solidFill>
-            <a:srgbClr val="EEF5F2"/>
+            <a:srgbClr val="EFF3F8"/>
           </a:solidFill>
           <a:ln>
             <a:noFill/>
@@ -3320,7 +3320,7 @@
             <a:avLst/>
           </a:prstGeom>
           <a:solidFill>
-            <a:srgbClr val="E1EEE9"/>
+            <a:srgbClr val="E3EAF3"/>
           </a:solidFill>
           <a:ln>
             <a:noFill/>
@@ -3425,7 +3425,7 @@
             <a:r>
               <a:rPr sz="2400" b="1" spc="120">
                 <a:solidFill>
-                  <a:srgbClr val="1E7F5B"/>
+                  <a:srgbClr val="2B5FA8"/>
                 </a:solidFill>
                 <a:latin typeface="Pretendard"/>
                 <a:ea typeface="Pretendard"/>
@@ -3628,7 +3628,7 @@
             <a:avLst/>
           </a:prstGeom>
           <a:solidFill>
-            <a:srgbClr val="F3F8F6"/>
+            <a:srgbClr val="F4F7FA"/>
           </a:solidFill>
           <a:ln>
             <a:noFill/>
@@ -3733,7 +3733,7 @@
             <a:r>
               <a:rPr sz="1950" b="1" spc="160">
                 <a:solidFill>
-                  <a:srgbClr val="1E7F5B"/>
+                  <a:srgbClr val="2B5FA8"/>
                 </a:solidFill>
                 <a:latin typeface="Pretendard"/>
                 <a:ea typeface="Pretendard"/>
@@ -4416,11 +4416,11 @@
             </a:avLst>
           </a:prstGeom>
           <a:solidFill>
-            <a:srgbClr val="E6F4EE"/>
+            <a:srgbClr val="EAF0F8"/>
           </a:solidFill>
           <a:ln w="9525">
             <a:solidFill>
-              <a:srgbClr val="C3E6D8"/>
+              <a:srgbClr val="C9DAF2"/>
             </a:solidFill>
           </a:ln>
           <a:effectLst/>
@@ -4619,7 +4619,7 @@
             <a:avLst/>
           </a:prstGeom>
           <a:solidFill>
-            <a:srgbClr val="F3F8F6"/>
+            <a:srgbClr val="F4F7FA"/>
           </a:solidFill>
           <a:ln>
             <a:noFill/>
@@ -4724,7 +4724,7 @@
             <a:r>
               <a:rPr sz="1950" b="1" spc="160">
                 <a:solidFill>
-                  <a:srgbClr val="1E7F5B"/>
+                  <a:srgbClr val="2B5FA8"/>
                 </a:solidFill>
                 <a:latin typeface="Pretendard"/>
                 <a:ea typeface="Pretendard"/>
@@ -4892,7 +4892,7 @@
             <a:avLst/>
           </a:prstGeom>
           <a:solidFill>
-            <a:srgbClr val="1E7F5B"/>
+            <a:srgbClr val="2B5FA8"/>
           </a:solidFill>
           <a:ln>
             <a:noFill/>
@@ -4963,7 +4963,7 @@
             <a:avLst/>
           </a:prstGeom>
           <a:solidFill>
-            <a:srgbClr val="1E7F5B"/>
+            <a:srgbClr val="2B5FA8"/>
           </a:solidFill>
           <a:ln>
             <a:noFill/>
@@ -5034,7 +5034,7 @@
             <a:avLst/>
           </a:prstGeom>
           <a:solidFill>
-            <a:srgbClr val="1E7F5B"/>
+            <a:srgbClr val="2B5FA8"/>
           </a:solidFill>
           <a:ln>
             <a:noFill/>
@@ -5107,11 +5107,11 @@
             </a:avLst>
           </a:prstGeom>
           <a:solidFill>
-            <a:srgbClr val="E6F4EE"/>
+            <a:srgbClr val="EAF0F8"/>
           </a:solidFill>
           <a:ln w="9525">
             <a:solidFill>
-              <a:srgbClr val="C3E6D8"/>
+              <a:srgbClr val="C9DAF2"/>
             </a:solidFill>
           </a:ln>
           <a:effectLst/>
@@ -5407,11 +5407,11 @@
             </a:avLst>
           </a:prstGeom>
           <a:solidFill>
-            <a:srgbClr val="E6F4EE"/>
+            <a:srgbClr val="EAF0F8"/>
           </a:solidFill>
           <a:ln w="9525">
             <a:solidFill>
-              <a:srgbClr val="C3E6D8"/>
+              <a:srgbClr val="C9DAF2"/>
             </a:solidFill>
           </a:ln>
           <a:effectLst/>
@@ -5707,11 +5707,11 @@
             </a:avLst>
           </a:prstGeom>
           <a:solidFill>
-            <a:srgbClr val="E6F4EE"/>
+            <a:srgbClr val="EAF0F8"/>
           </a:solidFill>
           <a:ln w="9525">
             <a:solidFill>
-              <a:srgbClr val="C3E6D8"/>
+              <a:srgbClr val="C9DAF2"/>
             </a:solidFill>
           </a:ln>
           <a:effectLst/>
@@ -6007,11 +6007,11 @@
             </a:avLst>
           </a:prstGeom>
           <a:solidFill>
-            <a:srgbClr val="E6F4EE"/>
+            <a:srgbClr val="EAF0F8"/>
           </a:solidFill>
           <a:ln w="9525">
             <a:solidFill>
-              <a:srgbClr val="C3E6D8"/>
+              <a:srgbClr val="C9DAF2"/>
             </a:solidFill>
           </a:ln>
           <a:effectLst/>
@@ -6307,11 +6307,11 @@
             </a:avLst>
           </a:prstGeom>
           <a:solidFill>
-            <a:srgbClr val="E6F4EE"/>
+            <a:srgbClr val="EAF0F8"/>
           </a:solidFill>
           <a:ln w="9525">
             <a:solidFill>
-              <a:srgbClr val="C3E6D8"/>
+              <a:srgbClr val="C9DAF2"/>
             </a:solidFill>
           </a:ln>
           <a:effectLst/>
@@ -6607,11 +6607,11 @@
             </a:avLst>
           </a:prstGeom>
           <a:solidFill>
-            <a:srgbClr val="E6F4EE"/>
+            <a:srgbClr val="EAF0F8"/>
           </a:solidFill>
           <a:ln w="9525">
             <a:solidFill>
-              <a:srgbClr val="C3E6D8"/>
+              <a:srgbClr val="C9DAF2"/>
             </a:solidFill>
           </a:ln>
           <a:effectLst/>
@@ -6907,11 +6907,11 @@
             </a:avLst>
           </a:prstGeom>
           <a:solidFill>
-            <a:srgbClr val="E6F4EE"/>
+            <a:srgbClr val="EAF0F8"/>
           </a:solidFill>
           <a:ln w="9525">
             <a:solidFill>
-              <a:srgbClr val="C3E6D8"/>
+              <a:srgbClr val="C9DAF2"/>
             </a:solidFill>
           </a:ln>
           <a:effectLst/>
@@ -7376,7 +7376,7 @@
             <a:avLst/>
           </a:prstGeom>
           <a:solidFill>
-            <a:srgbClr val="F3F8F6"/>
+            <a:srgbClr val="F4F7FA"/>
           </a:solidFill>
           <a:ln>
             <a:noFill/>
@@ -7481,7 +7481,7 @@
             <a:r>
               <a:rPr sz="1950" b="1" spc="160">
                 <a:solidFill>
-                  <a:srgbClr val="1E7F5B"/>
+                  <a:srgbClr val="2B5FA8"/>
                 </a:solidFill>
                 <a:latin typeface="Pretendard"/>
                 <a:ea typeface="Pretendard"/>
@@ -7612,7 +7612,7 @@
             <a:avLst/>
           </a:prstGeom>
           <a:solidFill>
-            <a:srgbClr val="1E7F5B"/>
+            <a:srgbClr val="2B5FA8"/>
           </a:solidFill>
           <a:ln>
             <a:noFill/>
@@ -7797,7 +7797,7 @@
             <a:avLst/>
           </a:prstGeom>
           <a:solidFill>
-            <a:srgbClr val="1E7F5B"/>
+            <a:srgbClr val="2B5FA8"/>
           </a:solidFill>
           <a:ln>
             <a:noFill/>
@@ -8078,7 +8078,7 @@
             <a:avLst/>
           </a:prstGeom>
           <a:solidFill>
-            <a:srgbClr val="F3F8F6"/>
+            <a:srgbClr val="F4F7FA"/>
           </a:solidFill>
           <a:ln>
             <a:noFill/>
@@ -8183,7 +8183,7 @@
             <a:r>
               <a:rPr sz="1950" b="1" spc="160">
                 <a:solidFill>
-                  <a:srgbClr val="1E7F5B"/>
+                  <a:srgbClr val="2B5FA8"/>
                 </a:solidFill>
                 <a:latin typeface="Pretendard"/>
                 <a:ea typeface="Pretendard"/>
@@ -8519,7 +8519,7 @@
             <a:avLst/>
           </a:prstGeom>
           <a:solidFill>
-            <a:srgbClr val="1E7F5B"/>
+            <a:srgbClr val="2B5FA8"/>
           </a:solidFill>
           <a:ln>
             <a:noFill/>
@@ -8847,7 +8847,7 @@
             <a:avLst/>
           </a:prstGeom>
           <a:solidFill>
-            <a:srgbClr val="1E7F5B"/>
+            <a:srgbClr val="2B5FA8"/>
           </a:solidFill>
           <a:ln>
             <a:noFill/>
@@ -9107,7 +9107,7 @@
             <a:avLst/>
           </a:prstGeom>
           <a:solidFill>
-            <a:srgbClr val="F3F8F6"/>
+            <a:srgbClr val="F4F7FA"/>
           </a:solidFill>
           <a:ln>
             <a:noFill/>
@@ -9212,7 +9212,7 @@
             <a:r>
               <a:rPr sz="1950" b="1" spc="160">
                 <a:solidFill>
-                  <a:srgbClr val="1E7F5B"/>
+                  <a:srgbClr val="2B5FA8"/>
                 </a:solidFill>
                 <a:latin typeface="Pretendard"/>
                 <a:ea typeface="Pretendard"/>
@@ -10041,11 +10041,11 @@
             </a:avLst>
           </a:prstGeom>
           <a:solidFill>
-            <a:srgbClr val="E6F4EE"/>
+            <a:srgbClr val="EAF0F8"/>
           </a:solidFill>
           <a:ln w="9525">
             <a:solidFill>
-              <a:srgbClr val="C3E6D8"/>
+              <a:srgbClr val="C9DAF2"/>
             </a:solidFill>
           </a:ln>
           <a:effectLst/>
@@ -10244,7 +10244,7 @@
             <a:avLst/>
           </a:prstGeom>
           <a:solidFill>
-            <a:srgbClr val="F3F8F6"/>
+            <a:srgbClr val="F4F7FA"/>
           </a:solidFill>
           <a:ln>
             <a:noFill/>
@@ -10349,7 +10349,7 @@
             <a:r>
               <a:rPr sz="1950" b="1" spc="160">
                 <a:solidFill>
-                  <a:srgbClr val="1E7F5B"/>
+                  <a:srgbClr val="2B5FA8"/>
                 </a:solidFill>
                 <a:latin typeface="Pretendard"/>
                 <a:ea typeface="Pretendard"/>
@@ -11096,7 +11096,7 @@
             <a:avLst/>
           </a:prstGeom>
           <a:solidFill>
-            <a:srgbClr val="C3E6D8"/>
+            <a:srgbClr val="C9DAF2"/>
           </a:solidFill>
           <a:ln>
             <a:noFill/>
@@ -11297,7 +11297,7 @@
             <a:avLst/>
           </a:prstGeom>
           <a:solidFill>
-            <a:srgbClr val="F3F8F6"/>
+            <a:srgbClr val="F4F7FA"/>
           </a:solidFill>
           <a:ln>
             <a:noFill/>
@@ -11402,7 +11402,7 @@
             <a:r>
               <a:rPr sz="2400" b="1">
                 <a:solidFill>
-                  <a:srgbClr val="1E7F5B"/>
+                  <a:srgbClr val="2B5FA8"/>
                 </a:solidFill>
                 <a:latin typeface="Pretendard"/>
                 <a:ea typeface="Pretendard"/>
@@ -11559,7 +11559,7 @@
             <a:r>
               <a:rPr sz="2475" b="1">
                 <a:solidFill>
-                  <a:srgbClr val="1E7F5B"/>
+                  <a:srgbClr val="2B5FA8"/>
                 </a:solidFill>
                 <a:latin typeface="Pretendard"/>
                 <a:ea typeface="Pretendard"/>
@@ -11675,7 +11675,7 @@
             <a:r>
               <a:rPr sz="2475" b="1">
                 <a:solidFill>
-                  <a:srgbClr val="1E7F5B"/>
+                  <a:srgbClr val="2B5FA8"/>
                 </a:solidFill>
                 <a:latin typeface="Pretendard"/>
                 <a:ea typeface="Pretendard"/>
@@ -11791,7 +11791,7 @@
             <a:r>
               <a:rPr sz="2475" b="1">
                 <a:solidFill>
-                  <a:srgbClr val="1E7F5B"/>
+                  <a:srgbClr val="2B5FA8"/>
                 </a:solidFill>
                 <a:latin typeface="Pretendard"/>
                 <a:ea typeface="Pretendard"/>
@@ -11907,7 +11907,7 @@
             <a:r>
               <a:rPr sz="2475" b="1">
                 <a:solidFill>
-                  <a:srgbClr val="1E7F5B"/>
+                  <a:srgbClr val="2B5FA8"/>
                 </a:solidFill>
                 <a:latin typeface="Pretendard"/>
                 <a:ea typeface="Pretendard"/>
@@ -11974,7 +11974,7 @@
             <a:avLst/>
           </a:prstGeom>
           <a:solidFill>
-            <a:srgbClr val="1E7F5B"/>
+            <a:srgbClr val="2B5FA8"/>
           </a:solidFill>
           <a:ln>
             <a:noFill/>
@@ -12019,7 +12019,7 @@
             <a:r>
               <a:rPr sz="1800" b="1" spc="140">
                 <a:solidFill>
-                  <a:srgbClr val="1E7F5B"/>
+                  <a:srgbClr val="2B5FA8"/>
                 </a:solidFill>
                 <a:latin typeface="Pretendard"/>
                 <a:ea typeface="Pretendard"/>
